--- a/docs/customer-documents/federal-aan-series/Vol_VII_Book_00_FedAAN_ServiceNow_Automation_Overview.pptx
+++ b/docs/customer-documents/federal-aan-series/Vol_VII_Book_00_FedAAN_ServiceNow_Automation_Overview.pptx
@@ -513,7 +513,7 @@
           <a:p/>
           <a:p>
             <a:r>
-              <a:t>Vendor sources: uiao repo: inbox/Application Aware Networking/</a:t>
+              <a:t>Vendor sources: host repo: docs/customer-documents/federal-aan-series/</a:t>
             </a:r>
           </a:p>
         </p:txBody>
@@ -659,7 +659,7 @@
           <a:p/>
           <a:p>
             <a:r>
-              <a:t>Vendor sources: https://learn.microsoft.com/graph/ | https://www.cisa.gov/scuba | uiao repo: inbox/Application Aware Networking/Vol_I_Book_01_FedAAN_SSA_Landing_Zone_IPAM_FedRAMP.qmd</a:t>
+              <a:t>Vendor sources: https://learn.microsoft.com/graph/ | https://www.cisa.gov/scuba | host repo: docs/customer-documents/federal-aan-series/Vol_I_Book_01_FedAAN_SSA_Landing_Zone_IPAM_FedRAMP.qmd</a:t>
             </a:r>
           </a:p>
         </p:txBody>
